--- a/Lecture/module_p_project/Lecture_p.3_Prompt_Formulation.pptx
+++ b/Lecture/module_p_project/Lecture_p.3_Prompt_Formulation.pptx
@@ -5,21 +5,20 @@
     <p:sldMasterId id="2147483648" r:id="rId1"/>
   </p:sldMasterIdLst>
   <p:notesMasterIdLst>
-    <p:notesMasterId r:id="rId14"/>
+    <p:notesMasterId r:id="rId13"/>
   </p:notesMasterIdLst>
   <p:sldIdLst>
     <p:sldId id="267" r:id="rId2"/>
-    <p:sldId id="268" r:id="rId3"/>
-    <p:sldId id="257" r:id="rId4"/>
-    <p:sldId id="258" r:id="rId5"/>
-    <p:sldId id="259" r:id="rId6"/>
-    <p:sldId id="260" r:id="rId7"/>
-    <p:sldId id="261" r:id="rId8"/>
-    <p:sldId id="262" r:id="rId9"/>
-    <p:sldId id="263" r:id="rId10"/>
-    <p:sldId id="264" r:id="rId11"/>
-    <p:sldId id="265" r:id="rId12"/>
-    <p:sldId id="270" r:id="rId13"/>
+    <p:sldId id="257" r:id="rId3"/>
+    <p:sldId id="258" r:id="rId4"/>
+    <p:sldId id="259" r:id="rId5"/>
+    <p:sldId id="260" r:id="rId6"/>
+    <p:sldId id="261" r:id="rId7"/>
+    <p:sldId id="262" r:id="rId8"/>
+    <p:sldId id="263" r:id="rId9"/>
+    <p:sldId id="264" r:id="rId10"/>
+    <p:sldId id="265" r:id="rId11"/>
+    <p:sldId id="270" r:id="rId12"/>
   </p:sldIdLst>
   <p:sldSz cx="12192000" cy="6858000"/>
   <p:notesSz cx="6858000" cy="12192000"/>
@@ -427,96 +426,6 @@
   <p:cSld>
     <p:spTree>
       <p:nvGrpSpPr>
-        <p:cNvPr id="1" name=""/>
-        <p:cNvGrpSpPr/>
-        <p:nvPr/>
-      </p:nvGrpSpPr>
-      <p:grpSpPr>
-        <a:xfrm>
-          <a:off x="0" y="0"/>
-          <a:ext cx="0" cy="0"/>
-          <a:chOff x="0" y="0"/>
-          <a:chExt cx="0" cy="0"/>
-        </a:xfrm>
-      </p:grpSpPr>
-      <p:sp>
-        <p:nvSpPr>
-          <p:cNvPr id="2" name="Slide Image Placeholder 1"/>
-          <p:cNvSpPr>
-            <a:spLocks noGrp="1" noRot="1" noChangeAspect="1"/>
-          </p:cNvSpPr>
-          <p:nvPr>
-            <p:ph type="sldImg"/>
-          </p:nvPr>
-        </p:nvSpPr>
-        <p:spPr/>
-      </p:sp>
-      <p:sp>
-        <p:nvSpPr>
-          <p:cNvPr id="3" name="Notes Placeholder 2"/>
-          <p:cNvSpPr>
-            <a:spLocks noGrp="1"/>
-          </p:cNvSpPr>
-          <p:nvPr>
-            <p:ph type="body" idx="1"/>
-          </p:nvPr>
-        </p:nvSpPr>
-        <p:spPr/>
-        <p:txBody>
-          <a:bodyPr/>
-          <a:lstStyle/>
-          <a:p>
-            <a:r>
-              <a:rPr lang="en-US" dirty="0"/>
-              <a:t>
-[Sources]
-- User-provided source deck: Prompt_Engineering_Neuroscience_Lecture.pptx
-[/Sources]</a:t>
-            </a:r>
-          </a:p>
-        </p:txBody>
-      </p:sp>
-      <p:sp>
-        <p:nvSpPr>
-          <p:cNvPr id="4" name="Slide Number Placeholder 3"/>
-          <p:cNvSpPr>
-            <a:spLocks noGrp="1"/>
-          </p:cNvSpPr>
-          <p:nvPr>
-            <p:ph type="sldNum" sz="quarter" idx="10"/>
-          </p:nvPr>
-        </p:nvSpPr>
-        <p:spPr/>
-        <p:txBody>
-          <a:bodyPr/>
-          <a:lstStyle/>
-          <a:p>
-            <a:fld id="{F7021451-1387-4CA6-816F-3879F97B5CBC}" type="slidenum">
-              <a:rPr lang="en-US"/>
-              <a:t>11</a:t>
-            </a:fld>
-            <a:endParaRPr lang="en-US"/>
-          </a:p>
-        </p:txBody>
-      </p:sp>
-    </p:spTree>
-    <p:extLst>
-      <p:ext uri="{BB962C8B-B14F-4D97-AF65-F5344CB8AC3E}">
-        <p14:creationId xmlns:p14="http://schemas.microsoft.com/office/powerpoint/2010/main" val="1024086991"/>
-      </p:ext>
-    </p:extLst>
-  </p:cSld>
-  <p:clrMapOvr>
-    <a:masterClrMapping/>
-  </p:clrMapOvr>
-</p:notes>
-</file>
-
-<file path=ppt/notesSlides/notesSlide12.xml><?xml version="1.0" encoding="utf-8"?>
-<p:notes xmlns:a="http://schemas.openxmlformats.org/drawingml/2006/main" xmlns:r="http://schemas.openxmlformats.org/officeDocument/2006/relationships" xmlns:p="http://schemas.openxmlformats.org/presentationml/2006/main">
-  <p:cSld>
-    <p:spTree>
-      <p:nvGrpSpPr>
         <p:cNvPr id="1" name="">
           <a:extLst>
             <a:ext uri="{FF2B5EF4-FFF2-40B4-BE49-F238E27FC236}">
@@ -607,7 +516,7 @@
           <a:p>
             <a:fld id="{F7021451-1387-4CA6-816F-3879F97B5CBC}" type="slidenum">
               <a:rPr lang="en-US"/>
-              <a:t>12</a:t>
+              <a:t>11</a:t>
             </a:fld>
             <a:endParaRPr lang="en-US"/>
           </a:p>
@@ -670,7 +579,13 @@
           <a:bodyPr/>
           <a:lstStyle/>
           <a:p>
-            <a:endParaRPr lang="en-US" dirty="0"/>
+            <a:r>
+              <a:rPr lang="en-US" dirty="0"/>
+              <a:t>
+[Sources]
+- User-provided source deck: Prompt_Engineering_Neuroscience_Lecture.pptx
+[/Sources]</a:t>
+            </a:r>
           </a:p>
         </p:txBody>
       </p:sp>
@@ -1445,7 +1360,7 @@
           </a:prstGeom>
           <a:extLst>
             <a:ext uri="{C572A759-6A51-4108-AA02-DFA0A04FC94B}">
-              <ma14:wrappingTextBoxFlag xmlns:ma14="http://schemas.microsoft.com/office/mac/drawingml/2011/main" xmlns="" val="0"/>
+              <ma14:wrappingTextBoxFlag xmlns="" xmlns:ma14="http://schemas.microsoft.com/office/mac/drawingml/2011/main" val="0"/>
             </a:ext>
           </a:extLst>
         </p:spPr>
@@ -1958,892 +1873,6 @@
 
 <file path=ppt/slides/slide10.xml><?xml version="1.0" encoding="utf-8"?>
 <p:sld xmlns:a="http://schemas.openxmlformats.org/drawingml/2006/main" xmlns:r="http://schemas.openxmlformats.org/officeDocument/2006/relationships" xmlns:p="http://schemas.openxmlformats.org/presentationml/2006/main">
-  <p:cSld name="Slide 9">
-    <p:bg>
-      <p:bgRef idx="1001">
-        <a:schemeClr val="bg1"/>
-      </p:bgRef>
-    </p:bg>
-    <p:spTree>
-      <p:nvGrpSpPr>
-        <p:cNvPr id="1" name=""/>
-        <p:cNvGrpSpPr/>
-        <p:nvPr/>
-      </p:nvGrpSpPr>
-      <p:grpSpPr>
-        <a:xfrm>
-          <a:off x="0" y="0"/>
-          <a:ext cx="0" cy="0"/>
-          <a:chOff x="0" y="0"/>
-          <a:chExt cx="0" cy="0"/>
-        </a:xfrm>
-      </p:grpSpPr>
-      <p:sp>
-        <p:nvSpPr>
-          <p:cNvPr id="2" name="Text 0"/>
-          <p:cNvSpPr/>
-          <p:nvPr/>
-        </p:nvSpPr>
-        <p:spPr>
-          <a:xfrm>
-            <a:off x="518160" y="380152"/>
-            <a:ext cx="8595360" cy="457200"/>
-          </a:xfrm>
-          <a:prstGeom prst="rect">
-            <a:avLst/>
-          </a:prstGeom>
-          <a:noFill/>
-          <a:ln/>
-        </p:spPr>
-        <p:txBody>
-          <a:bodyPr wrap="square" rtlCol="0" anchor="ctr"/>
-          <a:lstStyle/>
-          <a:p>
-            <a:r>
-              <a:rPr lang="en-US" sz="2700" dirty="0">
-                <a:solidFill>
-                  <a:srgbClr val="0F172A"/>
-                </a:solidFill>
-                <a:latin typeface="Aptos Display" pitchFamily="34" charset="0"/>
-              </a:rPr>
-              <a:t>Failure modes and risks in research settings</a:t>
-            </a:r>
-          </a:p>
-        </p:txBody>
-      </p:sp>
-      <p:sp>
-        <p:nvSpPr>
-          <p:cNvPr id="3" name="Text 1"/>
-          <p:cNvSpPr/>
-          <p:nvPr/>
-        </p:nvSpPr>
-        <p:spPr>
-          <a:xfrm>
-            <a:off x="518160" y="1148249"/>
-            <a:ext cx="9875520" cy="320040"/>
-          </a:xfrm>
-          <a:prstGeom prst="rect">
-            <a:avLst/>
-          </a:prstGeom>
-          <a:noFill/>
-          <a:ln/>
-        </p:spPr>
-        <p:txBody>
-          <a:bodyPr wrap="square" lIns="0" tIns="0" rIns="0" bIns="0" rtlCol="0" anchor="ctr"/>
-          <a:lstStyle/>
-          <a:p>
-            <a:r>
-              <a:rPr lang="en-US" sz="2400" dirty="0"/>
-              <a:t>LLMs are helpful accelerators, but they are not ground truth.</a:t>
-            </a:r>
-          </a:p>
-        </p:txBody>
-      </p:sp>
-      <p:sp>
-        <p:nvSpPr>
-          <p:cNvPr id="4" name="Shape 2"/>
-          <p:cNvSpPr/>
-          <p:nvPr/>
-        </p:nvSpPr>
-        <p:spPr>
-          <a:xfrm>
-            <a:off x="868680" y="1673352"/>
-            <a:ext cx="10424160" cy="722376"/>
-          </a:xfrm>
-          <a:prstGeom prst="roundRect">
-            <a:avLst>
-              <a:gd name="adj" fmla="val 9091"/>
-            </a:avLst>
-          </a:prstGeom>
-          <a:solidFill>
-            <a:srgbClr val="FDECEC"/>
-          </a:solidFill>
-          <a:ln w="12700">
-            <a:solidFill>
-              <a:srgbClr val="DCE5F0"/>
-            </a:solidFill>
-            <a:prstDash val="solid"/>
-          </a:ln>
-          <a:effectLst>
-            <a:outerShdw blurRad="12700" dist="6350" dir="2700000" algn="bl" rotWithShape="0">
-              <a:srgbClr val="000000">
-                <a:alpha val="12000"/>
-              </a:srgbClr>
-            </a:outerShdw>
-          </a:effectLst>
-        </p:spPr>
-        <p:txBody>
-          <a:bodyPr/>
-          <a:lstStyle/>
-          <a:p>
-            <a:endParaRPr lang="en-US"/>
-          </a:p>
-        </p:txBody>
-      </p:sp>
-      <p:sp>
-        <p:nvSpPr>
-          <p:cNvPr id="5" name="Shape 3"/>
-          <p:cNvSpPr/>
-          <p:nvPr/>
-        </p:nvSpPr>
-        <p:spPr>
-          <a:xfrm>
-            <a:off x="886968" y="1691640"/>
-            <a:ext cx="109728" cy="689541"/>
-          </a:xfrm>
-          <a:prstGeom prst="rect">
-            <a:avLst/>
-          </a:prstGeom>
-          <a:solidFill>
-            <a:srgbClr val="B42318"/>
-          </a:solidFill>
-          <a:ln w="12700">
-            <a:solidFill>
-              <a:srgbClr val="B42318"/>
-            </a:solidFill>
-            <a:prstDash val="solid"/>
-          </a:ln>
-        </p:spPr>
-        <p:txBody>
-          <a:bodyPr/>
-          <a:lstStyle/>
-          <a:p>
-            <a:endParaRPr lang="en-US"/>
-          </a:p>
-        </p:txBody>
-      </p:sp>
-      <p:sp>
-        <p:nvSpPr>
-          <p:cNvPr id="6" name="Text 4"/>
-          <p:cNvSpPr/>
-          <p:nvPr/>
-        </p:nvSpPr>
-        <p:spPr>
-          <a:xfrm>
-            <a:off x="1124712" y="1737360"/>
-            <a:ext cx="10058400" cy="256032"/>
-          </a:xfrm>
-          <a:prstGeom prst="rect">
-            <a:avLst/>
-          </a:prstGeom>
-          <a:noFill/>
-          <a:ln/>
-        </p:spPr>
-        <p:txBody>
-          <a:bodyPr wrap="square" lIns="0" tIns="0" rIns="0" bIns="0" rtlCol="0" anchor="ctr"/>
-          <a:lstStyle/>
-          <a:p>
-            <a:pPr marL="0" indent="0">
-              <a:buNone/>
-            </a:pPr>
-            <a:r>
-              <a:rPr lang="en-US" sz="1800" b="1" dirty="0">
-                <a:solidFill>
-                  <a:srgbClr val="10243E"/>
-                </a:solidFill>
-              </a:rPr>
-              <a:t>Hallucinated APIs or file paths</a:t>
-            </a:r>
-            <a:endParaRPr lang="en-US" sz="1800" dirty="0"/>
-          </a:p>
-        </p:txBody>
-      </p:sp>
-      <p:sp>
-        <p:nvSpPr>
-          <p:cNvPr id="7" name="Text 5"/>
-          <p:cNvSpPr/>
-          <p:nvPr/>
-        </p:nvSpPr>
-        <p:spPr>
-          <a:xfrm>
-            <a:off x="1124712" y="2020824"/>
-            <a:ext cx="10076688" cy="338328"/>
-          </a:xfrm>
-          <a:prstGeom prst="rect">
-            <a:avLst/>
-          </a:prstGeom>
-          <a:noFill/>
-          <a:ln/>
-        </p:spPr>
-        <p:txBody>
-          <a:bodyPr wrap="square" lIns="0" tIns="0" rIns="0" bIns="0" rtlCol="0" anchor="t"/>
-          <a:lstStyle/>
-          <a:p>
-            <a:pPr marL="0" indent="0">
-              <a:buNone/>
-            </a:pPr>
-            <a:r>
-              <a:rPr lang="en-US" dirty="0">
-                <a:solidFill>
-                  <a:srgbClr val="516173"/>
-                </a:solidFill>
-              </a:rPr>
-              <a:t>Model invents functions, packages, columns, or filenames that do not exist. </a:t>
-            </a:r>
-            <a:endParaRPr lang="en-US" dirty="0"/>
-          </a:p>
-        </p:txBody>
-      </p:sp>
-      <p:sp>
-        <p:nvSpPr>
-          <p:cNvPr id="8" name="Shape 6"/>
-          <p:cNvSpPr/>
-          <p:nvPr/>
-        </p:nvSpPr>
-        <p:spPr>
-          <a:xfrm>
-            <a:off x="868680" y="2523744"/>
-            <a:ext cx="10424160" cy="1024128"/>
-          </a:xfrm>
-          <a:prstGeom prst="roundRect">
-            <a:avLst>
-              <a:gd name="adj" fmla="val 9091"/>
-            </a:avLst>
-          </a:prstGeom>
-          <a:solidFill>
-            <a:srgbClr val="FFF3E7"/>
-          </a:solidFill>
-          <a:ln w="12700">
-            <a:solidFill>
-              <a:srgbClr val="DCE5F0"/>
-            </a:solidFill>
-            <a:prstDash val="solid"/>
-          </a:ln>
-          <a:effectLst>
-            <a:outerShdw blurRad="12700" dist="6350" dir="2700000" algn="bl" rotWithShape="0">
-              <a:srgbClr val="000000">
-                <a:alpha val="12000"/>
-              </a:srgbClr>
-            </a:outerShdw>
-          </a:effectLst>
-        </p:spPr>
-        <p:txBody>
-          <a:bodyPr/>
-          <a:lstStyle/>
-          <a:p>
-            <a:endParaRPr lang="en-US"/>
-          </a:p>
-        </p:txBody>
-      </p:sp>
-      <p:sp>
-        <p:nvSpPr>
-          <p:cNvPr id="9" name="Shape 7"/>
-          <p:cNvSpPr/>
-          <p:nvPr/>
-        </p:nvSpPr>
-        <p:spPr>
-          <a:xfrm>
-            <a:off x="886968" y="2542031"/>
-            <a:ext cx="109728" cy="977577"/>
-          </a:xfrm>
-          <a:prstGeom prst="rect">
-            <a:avLst/>
-          </a:prstGeom>
-          <a:solidFill>
-            <a:srgbClr val="B54708"/>
-          </a:solidFill>
-          <a:ln w="12700">
-            <a:solidFill>
-              <a:srgbClr val="B54708"/>
-            </a:solidFill>
-            <a:prstDash val="solid"/>
-          </a:ln>
-        </p:spPr>
-        <p:txBody>
-          <a:bodyPr/>
-          <a:lstStyle/>
-          <a:p>
-            <a:endParaRPr lang="en-US"/>
-          </a:p>
-        </p:txBody>
-      </p:sp>
-      <p:sp>
-        <p:nvSpPr>
-          <p:cNvPr id="10" name="Text 8"/>
-          <p:cNvSpPr/>
-          <p:nvPr/>
-        </p:nvSpPr>
-        <p:spPr>
-          <a:xfrm>
-            <a:off x="1124712" y="2624328"/>
-            <a:ext cx="10058400" cy="256032"/>
-          </a:xfrm>
-          <a:prstGeom prst="rect">
-            <a:avLst/>
-          </a:prstGeom>
-          <a:noFill/>
-          <a:ln/>
-        </p:spPr>
-        <p:txBody>
-          <a:bodyPr wrap="square" lIns="0" tIns="0" rIns="0" bIns="0" rtlCol="0" anchor="ctr"/>
-          <a:lstStyle/>
-          <a:p>
-            <a:pPr marL="0" indent="0">
-              <a:buNone/>
-            </a:pPr>
-            <a:r>
-              <a:rPr lang="en-US" sz="1800" b="1" dirty="0">
-                <a:solidFill>
-                  <a:srgbClr val="10243E"/>
-                </a:solidFill>
-              </a:rPr>
-              <a:t>Scientific overreach</a:t>
-            </a:r>
-            <a:endParaRPr lang="en-US" sz="1800" dirty="0"/>
-          </a:p>
-        </p:txBody>
-      </p:sp>
-      <p:sp>
-        <p:nvSpPr>
-          <p:cNvPr id="11" name="Text 9"/>
-          <p:cNvSpPr/>
-          <p:nvPr/>
-        </p:nvSpPr>
-        <p:spPr>
-          <a:xfrm>
-            <a:off x="1124712" y="2907792"/>
-            <a:ext cx="10076688" cy="548640"/>
-          </a:xfrm>
-          <a:prstGeom prst="rect">
-            <a:avLst/>
-          </a:prstGeom>
-          <a:noFill/>
-          <a:ln/>
-        </p:spPr>
-        <p:txBody>
-          <a:bodyPr wrap="square" lIns="0" tIns="0" rIns="0" bIns="0" rtlCol="0" anchor="t"/>
-          <a:lstStyle/>
-          <a:p>
-            <a:pPr marL="0" indent="0">
-              <a:buNone/>
-            </a:pPr>
-            <a:r>
-              <a:rPr lang="en-US" dirty="0">
-                <a:solidFill>
-                  <a:srgbClr val="516173"/>
-                </a:solidFill>
-              </a:rPr>
-              <a:t>Interpretation exceeds what the statistics support  </a:t>
-            </a:r>
-            <a:r>
-              <a:rPr lang="en-US" dirty="0">
-                <a:solidFill>
-                  <a:srgbClr val="516173"/>
-                </a:solidFill>
-                <a:sym typeface="Wingdings" pitchFamily="2" charset="2"/>
-              </a:rPr>
-              <a:t> </a:t>
-            </a:r>
-            <a:r>
-              <a:rPr lang="en-US" dirty="0">
-                <a:solidFill>
-                  <a:srgbClr val="516173"/>
-                </a:solidFill>
-              </a:rPr>
-              <a:t>cautious language and human review of conclusions.</a:t>
-            </a:r>
-            <a:endParaRPr lang="en-US" dirty="0"/>
-          </a:p>
-        </p:txBody>
-      </p:sp>
-      <p:sp>
-        <p:nvSpPr>
-          <p:cNvPr id="12" name="Shape 10"/>
-          <p:cNvSpPr/>
-          <p:nvPr/>
-        </p:nvSpPr>
-        <p:spPr>
-          <a:xfrm>
-            <a:off x="868680" y="3694176"/>
-            <a:ext cx="10424160" cy="804672"/>
-          </a:xfrm>
-          <a:prstGeom prst="roundRect">
-            <a:avLst>
-              <a:gd name="adj" fmla="val 9091"/>
-            </a:avLst>
-          </a:prstGeom>
-          <a:solidFill>
-            <a:srgbClr val="EAF2FF"/>
-          </a:solidFill>
-          <a:ln w="12700">
-            <a:solidFill>
-              <a:srgbClr val="DCE5F0"/>
-            </a:solidFill>
-            <a:prstDash val="solid"/>
-          </a:ln>
-          <a:effectLst>
-            <a:outerShdw blurRad="12700" dist="6350" dir="2700000" algn="bl" rotWithShape="0">
-              <a:srgbClr val="000000">
-                <a:alpha val="12000"/>
-              </a:srgbClr>
-            </a:outerShdw>
-          </a:effectLst>
-        </p:spPr>
-        <p:txBody>
-          <a:bodyPr/>
-          <a:lstStyle/>
-          <a:p>
-            <a:endParaRPr lang="en-US"/>
-          </a:p>
-        </p:txBody>
-      </p:sp>
-      <p:sp>
-        <p:nvSpPr>
-          <p:cNvPr id="13" name="Shape 11"/>
-          <p:cNvSpPr/>
-          <p:nvPr/>
-        </p:nvSpPr>
-        <p:spPr>
-          <a:xfrm>
-            <a:off x="886968" y="3712464"/>
-            <a:ext cx="109728" cy="768096"/>
-          </a:xfrm>
-          <a:prstGeom prst="rect">
-            <a:avLst/>
-          </a:prstGeom>
-          <a:solidFill>
-            <a:srgbClr val="2F6FDE"/>
-          </a:solidFill>
-          <a:ln w="12700">
-            <a:solidFill>
-              <a:srgbClr val="2F6FDE"/>
-            </a:solidFill>
-            <a:prstDash val="solid"/>
-          </a:ln>
-        </p:spPr>
-        <p:txBody>
-          <a:bodyPr/>
-          <a:lstStyle/>
-          <a:p>
-            <a:endParaRPr lang="en-US"/>
-          </a:p>
-        </p:txBody>
-      </p:sp>
-      <p:sp>
-        <p:nvSpPr>
-          <p:cNvPr id="14" name="Text 12"/>
-          <p:cNvSpPr/>
-          <p:nvPr/>
-        </p:nvSpPr>
-        <p:spPr>
-          <a:xfrm>
-            <a:off x="1124712" y="3749040"/>
-            <a:ext cx="10058400" cy="256032"/>
-          </a:xfrm>
-          <a:prstGeom prst="rect">
-            <a:avLst/>
-          </a:prstGeom>
-          <a:noFill/>
-          <a:ln/>
-        </p:spPr>
-        <p:txBody>
-          <a:bodyPr wrap="square" lIns="0" tIns="0" rIns="0" bIns="0" rtlCol="0" anchor="ctr"/>
-          <a:lstStyle/>
-          <a:p>
-            <a:pPr marL="0" indent="0">
-              <a:buNone/>
-            </a:pPr>
-            <a:r>
-              <a:rPr lang="en-US" sz="1800" b="1" dirty="0">
-                <a:solidFill>
-                  <a:srgbClr val="10243E"/>
-                </a:solidFill>
-              </a:rPr>
-              <a:t>Silent assumption injection</a:t>
-            </a:r>
-            <a:endParaRPr lang="en-US" sz="1800" dirty="0"/>
-          </a:p>
-        </p:txBody>
-      </p:sp>
-      <p:sp>
-        <p:nvSpPr>
-          <p:cNvPr id="15" name="Text 13"/>
-          <p:cNvSpPr/>
-          <p:nvPr/>
-        </p:nvSpPr>
-        <p:spPr>
-          <a:xfrm>
-            <a:off x="1124712" y="4096512"/>
-            <a:ext cx="10076688" cy="310896"/>
-          </a:xfrm>
-          <a:prstGeom prst="rect">
-            <a:avLst/>
-          </a:prstGeom>
-          <a:noFill/>
-          <a:ln/>
-        </p:spPr>
-        <p:txBody>
-          <a:bodyPr wrap="square" lIns="0" tIns="0" rIns="0" bIns="0" rtlCol="0" anchor="t"/>
-          <a:lstStyle/>
-          <a:p>
-            <a:pPr marL="0" indent="0">
-              <a:buNone/>
-            </a:pPr>
-            <a:r>
-              <a:rPr lang="en-US" dirty="0">
-                <a:solidFill>
-                  <a:srgbClr val="516173"/>
-                </a:solidFill>
-              </a:rPr>
-              <a:t>The model fills gaps without clearly flagging assumptions </a:t>
-            </a:r>
-            <a:r>
-              <a:rPr lang="en-US" dirty="0">
-                <a:solidFill>
-                  <a:srgbClr val="516173"/>
-                </a:solidFill>
-                <a:sym typeface="Wingdings" pitchFamily="2" charset="2"/>
-              </a:rPr>
-              <a:t> </a:t>
-            </a:r>
-            <a:r>
-              <a:rPr lang="en-US" dirty="0">
-                <a:solidFill>
-                  <a:srgbClr val="516173"/>
-                </a:solidFill>
-              </a:rPr>
-              <a:t>require explicit assumptions</a:t>
-            </a:r>
-            <a:endParaRPr lang="en-US" dirty="0"/>
-          </a:p>
-        </p:txBody>
-      </p:sp>
-      <p:sp>
-        <p:nvSpPr>
-          <p:cNvPr id="16" name="Shape 14"/>
-          <p:cNvSpPr/>
-          <p:nvPr/>
-        </p:nvSpPr>
-        <p:spPr>
-          <a:xfrm>
-            <a:off x="868680" y="4654296"/>
-            <a:ext cx="10424160" cy="804672"/>
-          </a:xfrm>
-          <a:prstGeom prst="roundRect">
-            <a:avLst>
-              <a:gd name="adj" fmla="val 9091"/>
-            </a:avLst>
-          </a:prstGeom>
-          <a:solidFill>
-            <a:srgbClr val="FDECEC"/>
-          </a:solidFill>
-          <a:ln w="12700">
-            <a:solidFill>
-              <a:srgbClr val="DCE5F0"/>
-            </a:solidFill>
-            <a:prstDash val="solid"/>
-          </a:ln>
-          <a:effectLst>
-            <a:outerShdw blurRad="12700" dist="6350" dir="2700000" algn="bl" rotWithShape="0">
-              <a:srgbClr val="000000">
-                <a:alpha val="12000"/>
-              </a:srgbClr>
-            </a:outerShdw>
-          </a:effectLst>
-        </p:spPr>
-        <p:txBody>
-          <a:bodyPr/>
-          <a:lstStyle/>
-          <a:p>
-            <a:endParaRPr lang="en-US"/>
-          </a:p>
-        </p:txBody>
-      </p:sp>
-      <p:sp>
-        <p:nvSpPr>
-          <p:cNvPr id="17" name="Shape 15"/>
-          <p:cNvSpPr/>
-          <p:nvPr/>
-        </p:nvSpPr>
-        <p:spPr>
-          <a:xfrm>
-            <a:off x="886968" y="4672584"/>
-            <a:ext cx="109728" cy="768096"/>
-          </a:xfrm>
-          <a:prstGeom prst="rect">
-            <a:avLst/>
-          </a:prstGeom>
-          <a:solidFill>
-            <a:srgbClr val="B42318"/>
-          </a:solidFill>
-          <a:ln w="12700">
-            <a:solidFill>
-              <a:srgbClr val="B42318"/>
-            </a:solidFill>
-            <a:prstDash val="solid"/>
-          </a:ln>
-        </p:spPr>
-        <p:txBody>
-          <a:bodyPr/>
-          <a:lstStyle/>
-          <a:p>
-            <a:endParaRPr lang="en-US"/>
-          </a:p>
-        </p:txBody>
-      </p:sp>
-      <p:sp>
-        <p:nvSpPr>
-          <p:cNvPr id="18" name="Text 16"/>
-          <p:cNvSpPr/>
-          <p:nvPr/>
-        </p:nvSpPr>
-        <p:spPr>
-          <a:xfrm>
-            <a:off x="1124712" y="4745736"/>
-            <a:ext cx="10058400" cy="256032"/>
-          </a:xfrm>
-          <a:prstGeom prst="rect">
-            <a:avLst/>
-          </a:prstGeom>
-          <a:noFill/>
-          <a:ln/>
-        </p:spPr>
-        <p:txBody>
-          <a:bodyPr wrap="square" lIns="0" tIns="0" rIns="0" bIns="0" rtlCol="0" anchor="ctr"/>
-          <a:lstStyle/>
-          <a:p>
-            <a:pPr marL="0" indent="0">
-              <a:buNone/>
-            </a:pPr>
-            <a:r>
-              <a:rPr lang="en-US" sz="1800" b="1" dirty="0">
-                <a:solidFill>
-                  <a:srgbClr val="10243E"/>
-                </a:solidFill>
-              </a:rPr>
-              <a:t>Data leakage / privacy</a:t>
-            </a:r>
-            <a:endParaRPr lang="en-US" sz="1800" dirty="0"/>
-          </a:p>
-        </p:txBody>
-      </p:sp>
-      <p:sp>
-        <p:nvSpPr>
-          <p:cNvPr id="19" name="Text 17"/>
-          <p:cNvSpPr/>
-          <p:nvPr/>
-        </p:nvSpPr>
-        <p:spPr>
-          <a:xfrm>
-            <a:off x="1124712" y="5074920"/>
-            <a:ext cx="10076688" cy="365760"/>
-          </a:xfrm>
-          <a:prstGeom prst="rect">
-            <a:avLst/>
-          </a:prstGeom>
-          <a:noFill/>
-          <a:ln/>
-        </p:spPr>
-        <p:txBody>
-          <a:bodyPr wrap="square" lIns="0" tIns="0" rIns="0" bIns="0" rtlCol="0" anchor="t"/>
-          <a:lstStyle/>
-          <a:p>
-            <a:pPr marL="0" indent="0">
-              <a:buNone/>
-            </a:pPr>
-            <a:r>
-              <a:rPr lang="en-US" dirty="0">
-                <a:solidFill>
-                  <a:srgbClr val="516173"/>
-                </a:solidFill>
-              </a:rPr>
-              <a:t>Sensitive data pasted into prompts may violate lab or patient-data rules. </a:t>
-            </a:r>
-            <a:endParaRPr lang="en-US" dirty="0"/>
-          </a:p>
-        </p:txBody>
-      </p:sp>
-      <p:sp>
-        <p:nvSpPr>
-          <p:cNvPr id="20" name="Shape 18"/>
-          <p:cNvSpPr/>
-          <p:nvPr/>
-        </p:nvSpPr>
-        <p:spPr>
-          <a:xfrm>
-            <a:off x="868680" y="5586984"/>
-            <a:ext cx="10424160" cy="804672"/>
-          </a:xfrm>
-          <a:prstGeom prst="roundRect">
-            <a:avLst>
-              <a:gd name="adj" fmla="val 9091"/>
-            </a:avLst>
-          </a:prstGeom>
-          <a:solidFill>
-            <a:srgbClr val="E7F6F2"/>
-          </a:solidFill>
-          <a:ln w="12700">
-            <a:solidFill>
-              <a:srgbClr val="DCE5F0"/>
-            </a:solidFill>
-            <a:prstDash val="solid"/>
-          </a:ln>
-          <a:effectLst>
-            <a:outerShdw blurRad="12700" dist="6350" dir="2700000" algn="bl" rotWithShape="0">
-              <a:srgbClr val="000000">
-                <a:alpha val="12000"/>
-              </a:srgbClr>
-            </a:outerShdw>
-          </a:effectLst>
-        </p:spPr>
-        <p:txBody>
-          <a:bodyPr/>
-          <a:lstStyle/>
-          <a:p>
-            <a:endParaRPr lang="en-US"/>
-          </a:p>
-        </p:txBody>
-      </p:sp>
-      <p:sp>
-        <p:nvSpPr>
-          <p:cNvPr id="21" name="Shape 19"/>
-          <p:cNvSpPr/>
-          <p:nvPr/>
-        </p:nvSpPr>
-        <p:spPr>
-          <a:xfrm>
-            <a:off x="886968" y="5605272"/>
-            <a:ext cx="109728" cy="768096"/>
-          </a:xfrm>
-          <a:prstGeom prst="rect">
-            <a:avLst/>
-          </a:prstGeom>
-          <a:solidFill>
-            <a:srgbClr val="0F766E"/>
-          </a:solidFill>
-          <a:ln w="12700">
-            <a:solidFill>
-              <a:srgbClr val="0F766E"/>
-            </a:solidFill>
-            <a:prstDash val="solid"/>
-          </a:ln>
-        </p:spPr>
-        <p:txBody>
-          <a:bodyPr/>
-          <a:lstStyle/>
-          <a:p>
-            <a:endParaRPr lang="en-US"/>
-          </a:p>
-        </p:txBody>
-      </p:sp>
-      <p:sp>
-        <p:nvSpPr>
-          <p:cNvPr id="22" name="Text 20"/>
-          <p:cNvSpPr/>
-          <p:nvPr/>
-        </p:nvSpPr>
-        <p:spPr>
-          <a:xfrm>
-            <a:off x="1124712" y="5678424"/>
-            <a:ext cx="10058400" cy="256032"/>
-          </a:xfrm>
-          <a:prstGeom prst="rect">
-            <a:avLst/>
-          </a:prstGeom>
-          <a:noFill/>
-          <a:ln/>
-        </p:spPr>
-        <p:txBody>
-          <a:bodyPr wrap="square" lIns="0" tIns="0" rIns="0" bIns="0" rtlCol="0" anchor="ctr"/>
-          <a:lstStyle/>
-          <a:p>
-            <a:pPr marL="0" indent="0">
-              <a:buNone/>
-            </a:pPr>
-            <a:r>
-              <a:rPr lang="en-US" sz="1800" b="1" dirty="0">
-                <a:solidFill>
-                  <a:srgbClr val="10243E"/>
-                </a:solidFill>
-              </a:rPr>
-              <a:t>Brittle dependence on phrasing</a:t>
-            </a:r>
-            <a:endParaRPr lang="en-US" sz="1800" dirty="0"/>
-          </a:p>
-        </p:txBody>
-      </p:sp>
-      <p:sp>
-        <p:nvSpPr>
-          <p:cNvPr id="23" name="Text 21"/>
-          <p:cNvSpPr/>
-          <p:nvPr/>
-        </p:nvSpPr>
-        <p:spPr>
-          <a:xfrm>
-            <a:off x="1124712" y="6099048"/>
-            <a:ext cx="10076688" cy="292608"/>
-          </a:xfrm>
-          <a:prstGeom prst="rect">
-            <a:avLst/>
-          </a:prstGeom>
-          <a:noFill/>
-          <a:ln/>
-        </p:spPr>
-        <p:txBody>
-          <a:bodyPr wrap="square" lIns="0" tIns="0" rIns="0" bIns="0" rtlCol="0" anchor="t"/>
-          <a:lstStyle/>
-          <a:p>
-            <a:pPr marL="0" indent="0">
-              <a:buNone/>
-            </a:pPr>
-            <a:r>
-              <a:rPr lang="en-US" dirty="0">
-                <a:solidFill>
-                  <a:srgbClr val="516173"/>
-                </a:solidFill>
-              </a:rPr>
-              <a:t>A solution works only for one wording and fails under small changes.  </a:t>
-            </a:r>
-            <a:endParaRPr lang="en-US" dirty="0"/>
-          </a:p>
-        </p:txBody>
-      </p:sp>
-      <p:sp>
-        <p:nvSpPr>
-          <p:cNvPr id="24" name="Shape 3">
-            <a:extLst>
-              <a:ext uri="{FF2B5EF4-FFF2-40B4-BE49-F238E27FC236}">
-                <a16:creationId xmlns:a16="http://schemas.microsoft.com/office/drawing/2014/main" id="{54918A35-04DC-E7DB-2840-CEAB741048BB}"/>
-              </a:ext>
-            </a:extLst>
-          </p:cNvPr>
-          <p:cNvSpPr/>
-          <p:nvPr/>
-        </p:nvSpPr>
-        <p:spPr>
-          <a:xfrm>
-            <a:off x="518160" y="956224"/>
-            <a:ext cx="11155680" cy="0"/>
-          </a:xfrm>
-          <a:prstGeom prst="line">
-            <a:avLst/>
-          </a:prstGeom>
-          <a:noFill/>
-          <a:ln w="12700">
-            <a:solidFill>
-              <a:srgbClr val="CBD5E1"/>
-            </a:solidFill>
-            <a:prstDash val="solid"/>
-          </a:ln>
-        </p:spPr>
-        <p:txBody>
-          <a:bodyPr/>
-          <a:lstStyle/>
-          <a:p>
-            <a:endParaRPr lang="en-US" dirty="0"/>
-          </a:p>
-        </p:txBody>
-      </p:sp>
-    </p:spTree>
-  </p:cSld>
-  <p:clrMapOvr>
-    <a:overrideClrMapping bg1="lt1" tx1="dk1" bg2="lt2" tx2="dk2" accent1="accent1" accent2="accent2" accent3="accent3" accent4="accent4" accent5="accent5" accent6="accent6" hlink="hlink" folHlink="folHlink"/>
-  </p:clrMapOvr>
-</p:sld>
-</file>
-
-<file path=ppt/slides/slide11.xml><?xml version="1.0" encoding="utf-8"?>
-<p:sld xmlns:a="http://schemas.openxmlformats.org/drawingml/2006/main" xmlns:r="http://schemas.openxmlformats.org/officeDocument/2006/relationships" xmlns:p="http://schemas.openxmlformats.org/presentationml/2006/main">
   <p:cSld name="Slide 10">
     <p:bg>
       <p:bgRef idx="1001">
@@ -3657,7 +2686,7 @@
           </a:prstGeom>
           <a:extLst>
             <a:ext uri="{C572A759-6A51-4108-AA02-DFA0A04FC94B}">
-              <ma14:wrappingTextBoxFlag xmlns:ma14="http://schemas.microsoft.com/office/mac/drawingml/2011/main" xmlns="" val="0"/>
+              <ma14:wrappingTextBoxFlag xmlns="" xmlns:ma14="http://schemas.microsoft.com/office/mac/drawingml/2011/main" val="0"/>
             </a:ext>
           </a:extLst>
         </p:spPr>
@@ -3676,7 +2705,7 @@
             <a:pPr algn="l"/>
             <a:fld id="{F7021451-1387-4CA6-816F-3879F97B5CBC}" type="slidenum">
               <a:rPr lang="en-US" b="0"/>
-              <a:t>11</a:t>
+              <a:t>10</a:t>
             </a:fld>
             <a:endParaRPr lang="en-US"/>
           </a:p>
@@ -3774,7 +2803,7 @@
 </p:sld>
 </file>
 
-<file path=ppt/slides/slide12.xml><?xml version="1.0" encoding="utf-8"?>
+<file path=ppt/slides/slide11.xml><?xml version="1.0" encoding="utf-8"?>
 <p:sld xmlns:a="http://schemas.openxmlformats.org/drawingml/2006/main" xmlns:r="http://schemas.openxmlformats.org/officeDocument/2006/relationships" xmlns:p="http://schemas.openxmlformats.org/presentationml/2006/main">
   <p:cSld>
     <p:spTree>
@@ -4088,7 +3117,7 @@
           </a:prstGeom>
           <a:extLst>
             <a:ext uri="{C572A759-6A51-4108-AA02-DFA0A04FC94B}">
-              <ma14:wrappingTextBoxFlag xmlns:ma14="http://schemas.microsoft.com/office/mac/drawingml/2011/main" xmlns="" val="0"/>
+              <ma14:wrappingTextBoxFlag xmlns="" xmlns:ma14="http://schemas.microsoft.com/office/mac/drawingml/2011/main" val="0"/>
             </a:ext>
           </a:extLst>
         </p:spPr>
@@ -4107,7 +3136,7 @@
             <a:pPr algn="l"/>
             <a:fld id="{F7021451-1387-4CA6-816F-3879F97B5CBC}" type="slidenum">
               <a:rPr lang="en-US" b="0"/>
-              <a:t>12</a:t>
+              <a:t>11</a:t>
             </a:fld>
             <a:endParaRPr lang="en-US"/>
           </a:p>
@@ -4211,530 +3240,6 @@
 </file>
 
 <file path=ppt/slides/slide2.xml><?xml version="1.0" encoding="utf-8"?>
-<p:sld xmlns:a="http://schemas.openxmlformats.org/drawingml/2006/main" xmlns:r="http://schemas.openxmlformats.org/officeDocument/2006/relationships" xmlns:p="http://schemas.openxmlformats.org/presentationml/2006/main">
-  <p:cSld>
-    <p:bg>
-      <p:bgRef idx="1001">
-        <a:schemeClr val="bg1"/>
-      </p:bgRef>
-    </p:bg>
-    <p:spTree>
-      <p:nvGrpSpPr>
-        <p:cNvPr id="1" name=""/>
-        <p:cNvGrpSpPr/>
-        <p:nvPr/>
-      </p:nvGrpSpPr>
-      <p:grpSpPr>
-        <a:xfrm>
-          <a:off x="0" y="0"/>
-          <a:ext cx="0" cy="0"/>
-          <a:chOff x="0" y="0"/>
-          <a:chExt cx="0" cy="0"/>
-        </a:xfrm>
-      </p:grpSpPr>
-      <p:sp>
-        <p:nvSpPr>
-          <p:cNvPr id="4" name="Text 2"/>
-          <p:cNvSpPr/>
-          <p:nvPr/>
-        </p:nvSpPr>
-        <p:spPr>
-          <a:xfrm>
-            <a:off x="502920" y="137014"/>
-            <a:ext cx="8046720" cy="786531"/>
-          </a:xfrm>
-          <a:prstGeom prst="rect">
-            <a:avLst/>
-          </a:prstGeom>
-          <a:noFill/>
-          <a:ln/>
-        </p:spPr>
-        <p:txBody>
-          <a:bodyPr wrap="square" rtlCol="0" anchor="ctr"/>
-          <a:lstStyle/>
-          <a:p>
-            <a:pPr marL="0" indent="0">
-              <a:buNone/>
-            </a:pPr>
-            <a:r>
-              <a:rPr lang="en-US" sz="2700" dirty="0">
-                <a:solidFill>
-                  <a:srgbClr val="0F172A"/>
-                </a:solidFill>
-                <a:latin typeface="Aptos Display" pitchFamily="34" charset="0"/>
-                <a:ea typeface="Aptos Display" pitchFamily="34" charset="-122"/>
-                <a:cs typeface="Aptos Display" pitchFamily="34" charset="-120"/>
-              </a:rPr>
-              <a:t>Why design comes first</a:t>
-            </a:r>
-            <a:endParaRPr lang="en-US" sz="2700" dirty="0"/>
-          </a:p>
-        </p:txBody>
-      </p:sp>
-      <p:sp>
-        <p:nvSpPr>
-          <p:cNvPr id="5" name="Shape 3"/>
-          <p:cNvSpPr/>
-          <p:nvPr/>
-        </p:nvSpPr>
-        <p:spPr>
-          <a:xfrm>
-            <a:off x="518160" y="956224"/>
-            <a:ext cx="11155680" cy="0"/>
-          </a:xfrm>
-          <a:prstGeom prst="line">
-            <a:avLst/>
-          </a:prstGeom>
-          <a:noFill/>
-          <a:ln w="12700">
-            <a:solidFill>
-              <a:srgbClr val="CBD5E1"/>
-            </a:solidFill>
-            <a:prstDash val="solid"/>
-          </a:ln>
-        </p:spPr>
-        <p:txBody>
-          <a:bodyPr/>
-          <a:lstStyle/>
-          <a:p>
-            <a:endParaRPr lang="en-US"/>
-          </a:p>
-        </p:txBody>
-      </p:sp>
-      <p:sp>
-        <p:nvSpPr>
-          <p:cNvPr id="6" name="Shape 4"/>
-          <p:cNvSpPr/>
-          <p:nvPr/>
-        </p:nvSpPr>
-        <p:spPr>
-          <a:xfrm>
-            <a:off x="640080" y="1545265"/>
-            <a:ext cx="2151888" cy="1968653"/>
-          </a:xfrm>
-          <a:prstGeom prst="roundRect">
-            <a:avLst>
-              <a:gd name="adj" fmla="val 1667"/>
-            </a:avLst>
-          </a:prstGeom>
-          <a:solidFill>
-            <a:srgbClr val="FEF2F2"/>
-          </a:solidFill>
-          <a:ln w="12700">
-            <a:solidFill>
-              <a:srgbClr val="FECACA"/>
-            </a:solidFill>
-            <a:prstDash val="solid"/>
-          </a:ln>
-        </p:spPr>
-        <p:txBody>
-          <a:bodyPr anchor="ctr"/>
-          <a:lstStyle/>
-          <a:p>
-            <a:pPr algn="ctr"/>
-            <a:endParaRPr lang="en-US" b="1" dirty="0">
-              <a:solidFill>
-                <a:srgbClr val="C00000"/>
-              </a:solidFill>
-              <a:latin typeface="Aptos" pitchFamily="34" charset="0"/>
-              <a:ea typeface="Aptos" pitchFamily="34" charset="-122"/>
-              <a:cs typeface="Aptos" pitchFamily="34" charset="-120"/>
-            </a:endParaRPr>
-          </a:p>
-          <a:p>
-            <a:pPr algn="ctr"/>
-            <a:r>
-              <a:rPr lang="en-US" sz="2400" dirty="0">
-                <a:solidFill>
-                  <a:srgbClr val="C00000"/>
-                </a:solidFill>
-              </a:rPr>
-              <a:t>Without explicit design</a:t>
-            </a:r>
-          </a:p>
-          <a:p>
-            <a:pPr algn="ctr"/>
-            <a:endParaRPr lang="en-US" b="1" dirty="0">
-              <a:solidFill>
-                <a:srgbClr val="C00000"/>
-              </a:solidFill>
-              <a:latin typeface="Aptos" pitchFamily="34" charset="0"/>
-              <a:ea typeface="Aptos" pitchFamily="34" charset="-122"/>
-              <a:cs typeface="Aptos" pitchFamily="34" charset="-120"/>
-            </a:endParaRPr>
-          </a:p>
-        </p:txBody>
-      </p:sp>
-      <p:sp>
-        <p:nvSpPr>
-          <p:cNvPr id="7" name="Shape 5"/>
-          <p:cNvSpPr/>
-          <p:nvPr/>
-        </p:nvSpPr>
-        <p:spPr>
-          <a:xfrm>
-            <a:off x="640080" y="3998546"/>
-            <a:ext cx="2151888" cy="1968653"/>
-          </a:xfrm>
-          <a:prstGeom prst="roundRect">
-            <a:avLst>
-              <a:gd name="adj" fmla="val 1667"/>
-            </a:avLst>
-          </a:prstGeom>
-          <a:solidFill>
-            <a:srgbClr val="F0FDF4"/>
-          </a:solidFill>
-          <a:ln w="12700">
-            <a:solidFill>
-              <a:srgbClr val="BBF7D0"/>
-            </a:solidFill>
-            <a:prstDash val="solid"/>
-          </a:ln>
-        </p:spPr>
-        <p:txBody>
-          <a:bodyPr anchor="ctr"/>
-          <a:lstStyle/>
-          <a:p>
-            <a:pPr algn="ctr"/>
-            <a:r>
-              <a:rPr lang="en-US" sz="2400" dirty="0">
-                <a:solidFill>
-                  <a:srgbClr val="16A34A"/>
-                </a:solidFill>
-              </a:rPr>
-              <a:t>With block design</a:t>
-            </a:r>
-            <a:endParaRPr lang="en-US" sz="2400" dirty="0"/>
-          </a:p>
-        </p:txBody>
-      </p:sp>
-      <p:sp>
-        <p:nvSpPr>
-          <p:cNvPr id="12" name="Text 10"/>
-          <p:cNvSpPr/>
-          <p:nvPr/>
-        </p:nvSpPr>
-        <p:spPr>
-          <a:xfrm>
-            <a:off x="9093783" y="2744481"/>
-            <a:ext cx="2727960" cy="1968642"/>
-          </a:xfrm>
-          <a:prstGeom prst="rect">
-            <a:avLst/>
-          </a:prstGeom>
-          <a:noFill/>
-          <a:ln/>
-        </p:spPr>
-        <p:txBody>
-          <a:bodyPr wrap="square" rtlCol="0" anchor="ctr"/>
-          <a:lstStyle/>
-          <a:p>
-            <a:pPr marL="0" indent="0" algn="ctr">
-              <a:buNone/>
-            </a:pPr>
-            <a:r>
-              <a:rPr lang="en-US" sz="2000" dirty="0"/>
-              <a:t>Design is the bridge between the scientific question and the implementation.</a:t>
-            </a:r>
-          </a:p>
-        </p:txBody>
-      </p:sp>
-      <p:sp>
-        <p:nvSpPr>
-          <p:cNvPr id="14" name="Shape 4">
-            <a:extLst>
-              <a:ext uri="{FF2B5EF4-FFF2-40B4-BE49-F238E27FC236}">
-                <a16:creationId xmlns:a16="http://schemas.microsoft.com/office/drawing/2014/main" id="{651EAC50-7FDD-9464-244A-F37B11AE4B12}"/>
-              </a:ext>
-            </a:extLst>
-          </p:cNvPr>
-          <p:cNvSpPr/>
-          <p:nvPr/>
-        </p:nvSpPr>
-        <p:spPr>
-          <a:xfrm>
-            <a:off x="3066288" y="1545265"/>
-            <a:ext cx="5483352" cy="1968658"/>
-          </a:xfrm>
-          <a:prstGeom prst="roundRect">
-            <a:avLst>
-              <a:gd name="adj" fmla="val 1667"/>
-            </a:avLst>
-          </a:prstGeom>
-          <a:solidFill>
-            <a:srgbClr val="FEF2F2"/>
-          </a:solidFill>
-          <a:ln w="12700">
-            <a:solidFill>
-              <a:srgbClr val="FECACA"/>
-            </a:solidFill>
-            <a:prstDash val="solid"/>
-          </a:ln>
-        </p:spPr>
-        <p:txBody>
-          <a:bodyPr anchor="ctr"/>
-          <a:lstStyle/>
-          <a:p>
-            <a:r>
-              <a:rPr lang="en-US" sz="2000" b="1" dirty="0">
-                <a:latin typeface="Aptos" pitchFamily="34" charset="0"/>
-                <a:ea typeface="Aptos" pitchFamily="34" charset="-122"/>
-                <a:cs typeface="Aptos" pitchFamily="34" charset="-120"/>
-              </a:rPr>
-              <a:t>• </a:t>
-            </a:r>
-            <a:r>
-              <a:rPr lang="en-US" sz="2000" dirty="0">
-                <a:latin typeface="Aptos" pitchFamily="34" charset="0"/>
-                <a:ea typeface="Aptos" pitchFamily="34" charset="-122"/>
-                <a:cs typeface="Aptos" pitchFamily="34" charset="-120"/>
-              </a:rPr>
-              <a:t>one giant notebook or script
-</a:t>
-            </a:r>
-            <a:r>
-              <a:rPr lang="en-US" sz="2000" b="1" dirty="0">
-                <a:latin typeface="Aptos" pitchFamily="34" charset="0"/>
-                <a:ea typeface="Aptos" pitchFamily="34" charset="-122"/>
-                <a:cs typeface="Aptos" pitchFamily="34" charset="-120"/>
-              </a:rPr>
-              <a:t>• </a:t>
-            </a:r>
-            <a:r>
-              <a:rPr lang="en-US" sz="2000" dirty="0">
-                <a:latin typeface="Aptos" pitchFamily="34" charset="0"/>
-                <a:ea typeface="Aptos" pitchFamily="34" charset="-122"/>
-                <a:cs typeface="Aptos" pitchFamily="34" charset="-120"/>
-              </a:rPr>
-              <a:t>mixed preprocessing and statistics
-</a:t>
-            </a:r>
-            <a:r>
-              <a:rPr lang="en-US" sz="2000" b="1" dirty="0">
-                <a:latin typeface="Aptos" pitchFamily="34" charset="0"/>
-                <a:ea typeface="Aptos" pitchFamily="34" charset="-122"/>
-                <a:cs typeface="Aptos" pitchFamily="34" charset="-120"/>
-              </a:rPr>
-              <a:t>• </a:t>
-            </a:r>
-            <a:r>
-              <a:rPr lang="en-US" sz="2000" dirty="0">
-                <a:latin typeface="Aptos" pitchFamily="34" charset="0"/>
-                <a:ea typeface="Aptos" pitchFamily="34" charset="-122"/>
-                <a:cs typeface="Aptos" pitchFamily="34" charset="-120"/>
-              </a:rPr>
-              <a:t>hidden assumptions about files or trials
-</a:t>
-            </a:r>
-            <a:r>
-              <a:rPr lang="en-US" sz="2000" b="1" dirty="0">
-                <a:latin typeface="Aptos" pitchFamily="34" charset="0"/>
-                <a:ea typeface="Aptos" pitchFamily="34" charset="-122"/>
-                <a:cs typeface="Aptos" pitchFamily="34" charset="-120"/>
-              </a:rPr>
-              <a:t>• </a:t>
-            </a:r>
-            <a:r>
-              <a:rPr lang="en-US" sz="2000" dirty="0">
-                <a:latin typeface="Aptos" pitchFamily="34" charset="0"/>
-                <a:ea typeface="Aptos" pitchFamily="34" charset="-122"/>
-                <a:cs typeface="Aptos" pitchFamily="34" charset="-120"/>
-              </a:rPr>
-              <a:t>hard to debug or rerun later
-</a:t>
-            </a:r>
-            <a:r>
-              <a:rPr lang="en-US" sz="2000" b="1" dirty="0">
-                <a:latin typeface="Aptos" pitchFamily="34" charset="0"/>
-                <a:ea typeface="Aptos" pitchFamily="34" charset="-122"/>
-                <a:cs typeface="Aptos" pitchFamily="34" charset="-120"/>
-              </a:rPr>
-              <a:t>• weak reproducibility</a:t>
-            </a:r>
-            <a:endParaRPr lang="en-US" sz="2000" b="1" dirty="0"/>
-          </a:p>
-        </p:txBody>
-      </p:sp>
-      <p:sp>
-        <p:nvSpPr>
-          <p:cNvPr id="15" name="Shape 5">
-            <a:extLst>
-              <a:ext uri="{FF2B5EF4-FFF2-40B4-BE49-F238E27FC236}">
-                <a16:creationId xmlns:a16="http://schemas.microsoft.com/office/drawing/2014/main" id="{D4ED3EAC-670C-DF6A-04AC-1EC93CB16D28}"/>
-              </a:ext>
-            </a:extLst>
-          </p:cNvPr>
-          <p:cNvSpPr/>
-          <p:nvPr/>
-        </p:nvSpPr>
-        <p:spPr>
-          <a:xfrm>
-            <a:off x="3050498" y="3998547"/>
-            <a:ext cx="5499142" cy="1968652"/>
-          </a:xfrm>
-          <a:prstGeom prst="roundRect">
-            <a:avLst>
-              <a:gd name="adj" fmla="val 1667"/>
-            </a:avLst>
-          </a:prstGeom>
-          <a:solidFill>
-            <a:srgbClr val="F0FDF4"/>
-          </a:solidFill>
-          <a:ln w="12700">
-            <a:solidFill>
-              <a:srgbClr val="BBF7D0"/>
-            </a:solidFill>
-            <a:prstDash val="solid"/>
-          </a:ln>
-        </p:spPr>
-        <p:txBody>
-          <a:bodyPr anchor="ctr"/>
-          <a:lstStyle/>
-          <a:p>
-            <a:r>
-              <a:rPr lang="en-US" sz="2000" dirty="0">
-                <a:latin typeface="Aptos" pitchFamily="34" charset="0"/>
-              </a:rPr>
-              <a:t>• clear data flow between stages
-• </a:t>
-            </a:r>
-            <a:r>
-              <a:rPr lang="en-US" sz="2000" b="1" dirty="0">
-                <a:latin typeface="Aptos" pitchFamily="34" charset="0"/>
-              </a:rPr>
-              <a:t>reusable</a:t>
-            </a:r>
-            <a:r>
-              <a:rPr lang="en-US" sz="2000" dirty="0">
-                <a:latin typeface="Aptos" pitchFamily="34" charset="0"/>
-              </a:rPr>
-              <a:t> preprocessing and QC
-• parameters kept </a:t>
-            </a:r>
-            <a:r>
-              <a:rPr lang="en-US" sz="2000" b="1" dirty="0">
-                <a:latin typeface="Aptos" pitchFamily="34" charset="0"/>
-              </a:rPr>
-              <a:t>explicit</a:t>
-            </a:r>
-            <a:r>
-              <a:rPr lang="en-US" sz="2000" dirty="0">
-                <a:latin typeface="Aptos" pitchFamily="34" charset="0"/>
-              </a:rPr>
-              <a:t>
-• easier testing and debugging
-• cleaner collaboration and </a:t>
-            </a:r>
-            <a:r>
-              <a:rPr lang="en-US" sz="2000" b="1" dirty="0">
-                <a:latin typeface="Aptos" pitchFamily="34" charset="0"/>
-              </a:rPr>
-              <a:t>replication</a:t>
-            </a:r>
-          </a:p>
-        </p:txBody>
-      </p:sp>
-      <p:cxnSp>
-        <p:nvCxnSpPr>
-          <p:cNvPr id="19" name="Elbow Connector 18">
-            <a:extLst>
-              <a:ext uri="{FF2B5EF4-FFF2-40B4-BE49-F238E27FC236}">
-                <a16:creationId xmlns:a16="http://schemas.microsoft.com/office/drawing/2014/main" id="{664A34F7-069D-4FBA-3878-FD25DF60A631}"/>
-              </a:ext>
-            </a:extLst>
-          </p:cNvPr>
-          <p:cNvCxnSpPr>
-            <a:cxnSpLocks/>
-            <a:stCxn id="14" idx="3"/>
-            <a:endCxn id="12" idx="0"/>
-          </p:cNvCxnSpPr>
-          <p:nvPr/>
-        </p:nvCxnSpPr>
-        <p:spPr>
-          <a:xfrm>
-            <a:off x="8549640" y="2529594"/>
-            <a:ext cx="1908123" cy="214887"/>
-          </a:xfrm>
-          <a:prstGeom prst="bentConnector2">
-            <a:avLst/>
-          </a:prstGeom>
-          <a:ln w="28575">
-            <a:solidFill>
-              <a:schemeClr val="tx1"/>
-            </a:solidFill>
-            <a:tailEnd type="triangle"/>
-          </a:ln>
-        </p:spPr>
-        <p:style>
-          <a:lnRef idx="1">
-            <a:schemeClr val="accent1"/>
-          </a:lnRef>
-          <a:fillRef idx="0">
-            <a:schemeClr val="accent1"/>
-          </a:fillRef>
-          <a:effectRef idx="0">
-            <a:schemeClr val="accent1"/>
-          </a:effectRef>
-          <a:fontRef idx="minor">
-            <a:schemeClr val="tx1"/>
-          </a:fontRef>
-        </p:style>
-      </p:cxnSp>
-      <p:cxnSp>
-        <p:nvCxnSpPr>
-          <p:cNvPr id="21" name="Elbow Connector 20">
-            <a:extLst>
-              <a:ext uri="{FF2B5EF4-FFF2-40B4-BE49-F238E27FC236}">
-                <a16:creationId xmlns:a16="http://schemas.microsoft.com/office/drawing/2014/main" id="{24B8B430-B4BB-A52A-B762-35CC2B7E3AF1}"/>
-              </a:ext>
-            </a:extLst>
-          </p:cNvPr>
-          <p:cNvCxnSpPr>
-            <a:cxnSpLocks/>
-            <a:stCxn id="15" idx="3"/>
-            <a:endCxn id="12" idx="2"/>
-          </p:cNvCxnSpPr>
-          <p:nvPr/>
-        </p:nvCxnSpPr>
-        <p:spPr>
-          <a:xfrm flipV="1">
-            <a:off x="8549640" y="4713123"/>
-            <a:ext cx="1908123" cy="269750"/>
-          </a:xfrm>
-          <a:prstGeom prst="bentConnector2">
-            <a:avLst/>
-          </a:prstGeom>
-          <a:ln w="28575">
-            <a:solidFill>
-              <a:schemeClr val="tx1"/>
-            </a:solidFill>
-            <a:tailEnd type="triangle"/>
-          </a:ln>
-        </p:spPr>
-        <p:style>
-          <a:lnRef idx="1">
-            <a:schemeClr val="accent1"/>
-          </a:lnRef>
-          <a:fillRef idx="0">
-            <a:schemeClr val="accent1"/>
-          </a:fillRef>
-          <a:effectRef idx="0">
-            <a:schemeClr val="accent1"/>
-          </a:effectRef>
-          <a:fontRef idx="minor">
-            <a:schemeClr val="tx1"/>
-          </a:fontRef>
-        </p:style>
-      </p:cxnSp>
-    </p:spTree>
-  </p:cSld>
-  <p:clrMapOvr>
-    <a:overrideClrMapping bg1="lt1" tx1="dk1" bg2="lt2" tx2="dk2" accent1="accent1" accent2="accent2" accent3="accent3" accent4="accent4" accent5="accent5" accent6="accent6" hlink="hlink" folHlink="folHlink"/>
-  </p:clrMapOvr>
-</p:sld>
-</file>
-
-<file path=ppt/slides/slide3.xml><?xml version="1.0" encoding="utf-8"?>
 <p:sld xmlns:a="http://schemas.openxmlformats.org/drawingml/2006/main" xmlns:r="http://schemas.openxmlformats.org/officeDocument/2006/relationships" xmlns:p="http://schemas.openxmlformats.org/presentationml/2006/main">
   <p:cSld name="Slide 2">
     <p:bg>
@@ -5399,7 +3904,7 @@
 </p:sld>
 </file>
 
-<file path=ppt/slides/slide4.xml><?xml version="1.0" encoding="utf-8"?>
+<file path=ppt/slides/slide3.xml><?xml version="1.0" encoding="utf-8"?>
 <p:sld xmlns:a="http://schemas.openxmlformats.org/drawingml/2006/main" xmlns:r="http://schemas.openxmlformats.org/officeDocument/2006/relationships" xmlns:p="http://schemas.openxmlformats.org/presentationml/2006/main">
   <p:cSld name="Slide 3">
     <p:bg>
@@ -6624,7 +5129,7 @@
 </p:sld>
 </file>
 
-<file path=ppt/slides/slide5.xml><?xml version="1.0" encoding="utf-8"?>
+<file path=ppt/slides/slide4.xml><?xml version="1.0" encoding="utf-8"?>
 <p:sld xmlns:a="http://schemas.openxmlformats.org/drawingml/2006/main" xmlns:r="http://schemas.openxmlformats.org/officeDocument/2006/relationships" xmlns:p="http://schemas.openxmlformats.org/presentationml/2006/main">
   <p:cSld name="Slide 4">
     <p:bg>
@@ -7430,7 +5935,7 @@
           </a:prstGeom>
           <a:extLst>
             <a:ext uri="{C572A759-6A51-4108-AA02-DFA0A04FC94B}">
-              <ma14:wrappingTextBoxFlag xmlns:ma14="http://schemas.microsoft.com/office/mac/drawingml/2011/main" xmlns="" val="0"/>
+              <ma14:wrappingTextBoxFlag xmlns="" xmlns:ma14="http://schemas.microsoft.com/office/mac/drawingml/2011/main" val="0"/>
             </a:ext>
           </a:extLst>
         </p:spPr>
@@ -7449,7 +5954,7 @@
             <a:pPr algn="l"/>
             <a:fld id="{F7021451-1387-4CA6-816F-3879F97B5CBC}" type="slidenum">
               <a:rPr lang="en-US" b="0"/>
-              <a:t>5</a:t>
+              <a:t>4</a:t>
             </a:fld>
             <a:endParaRPr lang="en-US"/>
           </a:p>
@@ -7663,7 +6168,7 @@
 </p:sld>
 </file>
 
-<file path=ppt/slides/slide6.xml><?xml version="1.0" encoding="utf-8"?>
+<file path=ppt/slides/slide5.xml><?xml version="1.0" encoding="utf-8"?>
 <p:sld xmlns:a="http://schemas.openxmlformats.org/drawingml/2006/main" xmlns:r="http://schemas.openxmlformats.org/officeDocument/2006/relationships" xmlns:p="http://schemas.openxmlformats.org/presentationml/2006/main">
   <p:cSld name="Slide 5">
     <p:bg>
@@ -8623,7 +7128,7 @@
 </p:sld>
 </file>
 
-<file path=ppt/slides/slide7.xml><?xml version="1.0" encoding="utf-8"?>
+<file path=ppt/slides/slide6.xml><?xml version="1.0" encoding="utf-8"?>
 <p:sld xmlns:a="http://schemas.openxmlformats.org/drawingml/2006/main" xmlns:r="http://schemas.openxmlformats.org/officeDocument/2006/relationships" xmlns:p="http://schemas.openxmlformats.org/presentationml/2006/main">
   <p:cSld name="Slide 6">
     <p:bg>
@@ -9612,7 +8117,7 @@
 </p:sld>
 </file>
 
-<file path=ppt/slides/slide8.xml><?xml version="1.0" encoding="utf-8"?>
+<file path=ppt/slides/slide7.xml><?xml version="1.0" encoding="utf-8"?>
 <p:sld xmlns:a="http://schemas.openxmlformats.org/drawingml/2006/main" xmlns:r="http://schemas.openxmlformats.org/officeDocument/2006/relationships" xmlns:p="http://schemas.openxmlformats.org/presentationml/2006/main">
   <p:cSld name="Slide 7">
     <p:bg>
@@ -10533,7 +9038,7 @@
 </p:sld>
 </file>
 
-<file path=ppt/slides/slide9.xml><?xml version="1.0" encoding="utf-8"?>
+<file path=ppt/slides/slide8.xml><?xml version="1.0" encoding="utf-8"?>
 <p:sld xmlns:a="http://schemas.openxmlformats.org/drawingml/2006/main" xmlns:r="http://schemas.openxmlformats.org/officeDocument/2006/relationships" xmlns:p="http://schemas.openxmlformats.org/presentationml/2006/main">
   <p:cSld name="Slide 8">
     <p:bg>
@@ -11197,6 +9702,892 @@
             <a:extLst>
               <a:ext uri="{FF2B5EF4-FFF2-40B4-BE49-F238E27FC236}">
                 <a16:creationId xmlns:a16="http://schemas.microsoft.com/office/drawing/2014/main" id="{AE2D5D59-87CC-63B3-4D04-51BC569C3577}"/>
+              </a:ext>
+            </a:extLst>
+          </p:cNvPr>
+          <p:cNvSpPr/>
+          <p:nvPr/>
+        </p:nvSpPr>
+        <p:spPr>
+          <a:xfrm>
+            <a:off x="518160" y="956224"/>
+            <a:ext cx="11155680" cy="0"/>
+          </a:xfrm>
+          <a:prstGeom prst="line">
+            <a:avLst/>
+          </a:prstGeom>
+          <a:noFill/>
+          <a:ln w="12700">
+            <a:solidFill>
+              <a:srgbClr val="CBD5E1"/>
+            </a:solidFill>
+            <a:prstDash val="solid"/>
+          </a:ln>
+        </p:spPr>
+        <p:txBody>
+          <a:bodyPr/>
+          <a:lstStyle/>
+          <a:p>
+            <a:endParaRPr lang="en-US" dirty="0"/>
+          </a:p>
+        </p:txBody>
+      </p:sp>
+    </p:spTree>
+  </p:cSld>
+  <p:clrMapOvr>
+    <a:overrideClrMapping bg1="lt1" tx1="dk1" bg2="lt2" tx2="dk2" accent1="accent1" accent2="accent2" accent3="accent3" accent4="accent4" accent5="accent5" accent6="accent6" hlink="hlink" folHlink="folHlink"/>
+  </p:clrMapOvr>
+</p:sld>
+</file>
+
+<file path=ppt/slides/slide9.xml><?xml version="1.0" encoding="utf-8"?>
+<p:sld xmlns:a="http://schemas.openxmlformats.org/drawingml/2006/main" xmlns:r="http://schemas.openxmlformats.org/officeDocument/2006/relationships" xmlns:p="http://schemas.openxmlformats.org/presentationml/2006/main">
+  <p:cSld name="Slide 9">
+    <p:bg>
+      <p:bgRef idx="1001">
+        <a:schemeClr val="bg1"/>
+      </p:bgRef>
+    </p:bg>
+    <p:spTree>
+      <p:nvGrpSpPr>
+        <p:cNvPr id="1" name=""/>
+        <p:cNvGrpSpPr/>
+        <p:nvPr/>
+      </p:nvGrpSpPr>
+      <p:grpSpPr>
+        <a:xfrm>
+          <a:off x="0" y="0"/>
+          <a:ext cx="0" cy="0"/>
+          <a:chOff x="0" y="0"/>
+          <a:chExt cx="0" cy="0"/>
+        </a:xfrm>
+      </p:grpSpPr>
+      <p:sp>
+        <p:nvSpPr>
+          <p:cNvPr id="2" name="Text 0"/>
+          <p:cNvSpPr/>
+          <p:nvPr/>
+        </p:nvSpPr>
+        <p:spPr>
+          <a:xfrm>
+            <a:off x="518160" y="380152"/>
+            <a:ext cx="8595360" cy="457200"/>
+          </a:xfrm>
+          <a:prstGeom prst="rect">
+            <a:avLst/>
+          </a:prstGeom>
+          <a:noFill/>
+          <a:ln/>
+        </p:spPr>
+        <p:txBody>
+          <a:bodyPr wrap="square" rtlCol="0" anchor="ctr"/>
+          <a:lstStyle/>
+          <a:p>
+            <a:r>
+              <a:rPr lang="en-US" sz="2700" dirty="0">
+                <a:solidFill>
+                  <a:srgbClr val="0F172A"/>
+                </a:solidFill>
+                <a:latin typeface="Aptos Display" pitchFamily="34" charset="0"/>
+              </a:rPr>
+              <a:t>Failure modes and risks in research settings</a:t>
+            </a:r>
+          </a:p>
+        </p:txBody>
+      </p:sp>
+      <p:sp>
+        <p:nvSpPr>
+          <p:cNvPr id="3" name="Text 1"/>
+          <p:cNvSpPr/>
+          <p:nvPr/>
+        </p:nvSpPr>
+        <p:spPr>
+          <a:xfrm>
+            <a:off x="518160" y="1148249"/>
+            <a:ext cx="9875520" cy="320040"/>
+          </a:xfrm>
+          <a:prstGeom prst="rect">
+            <a:avLst/>
+          </a:prstGeom>
+          <a:noFill/>
+          <a:ln/>
+        </p:spPr>
+        <p:txBody>
+          <a:bodyPr wrap="square" lIns="0" tIns="0" rIns="0" bIns="0" rtlCol="0" anchor="ctr"/>
+          <a:lstStyle/>
+          <a:p>
+            <a:r>
+              <a:rPr lang="en-US" sz="2400" dirty="0"/>
+              <a:t>LLMs are helpful accelerators, but they are not ground truth.</a:t>
+            </a:r>
+          </a:p>
+        </p:txBody>
+      </p:sp>
+      <p:sp>
+        <p:nvSpPr>
+          <p:cNvPr id="4" name="Shape 2"/>
+          <p:cNvSpPr/>
+          <p:nvPr/>
+        </p:nvSpPr>
+        <p:spPr>
+          <a:xfrm>
+            <a:off x="868680" y="1673352"/>
+            <a:ext cx="10424160" cy="722376"/>
+          </a:xfrm>
+          <a:prstGeom prst="roundRect">
+            <a:avLst>
+              <a:gd name="adj" fmla="val 9091"/>
+            </a:avLst>
+          </a:prstGeom>
+          <a:solidFill>
+            <a:srgbClr val="FDECEC"/>
+          </a:solidFill>
+          <a:ln w="12700">
+            <a:solidFill>
+              <a:srgbClr val="DCE5F0"/>
+            </a:solidFill>
+            <a:prstDash val="solid"/>
+          </a:ln>
+          <a:effectLst>
+            <a:outerShdw blurRad="12700" dist="6350" dir="2700000" algn="bl" rotWithShape="0">
+              <a:srgbClr val="000000">
+                <a:alpha val="12000"/>
+              </a:srgbClr>
+            </a:outerShdw>
+          </a:effectLst>
+        </p:spPr>
+        <p:txBody>
+          <a:bodyPr/>
+          <a:lstStyle/>
+          <a:p>
+            <a:endParaRPr lang="en-US"/>
+          </a:p>
+        </p:txBody>
+      </p:sp>
+      <p:sp>
+        <p:nvSpPr>
+          <p:cNvPr id="5" name="Shape 3"/>
+          <p:cNvSpPr/>
+          <p:nvPr/>
+        </p:nvSpPr>
+        <p:spPr>
+          <a:xfrm>
+            <a:off x="886968" y="1691640"/>
+            <a:ext cx="109728" cy="689541"/>
+          </a:xfrm>
+          <a:prstGeom prst="rect">
+            <a:avLst/>
+          </a:prstGeom>
+          <a:solidFill>
+            <a:srgbClr val="B42318"/>
+          </a:solidFill>
+          <a:ln w="12700">
+            <a:solidFill>
+              <a:srgbClr val="B42318"/>
+            </a:solidFill>
+            <a:prstDash val="solid"/>
+          </a:ln>
+        </p:spPr>
+        <p:txBody>
+          <a:bodyPr/>
+          <a:lstStyle/>
+          <a:p>
+            <a:endParaRPr lang="en-US"/>
+          </a:p>
+        </p:txBody>
+      </p:sp>
+      <p:sp>
+        <p:nvSpPr>
+          <p:cNvPr id="6" name="Text 4"/>
+          <p:cNvSpPr/>
+          <p:nvPr/>
+        </p:nvSpPr>
+        <p:spPr>
+          <a:xfrm>
+            <a:off x="1124712" y="1737360"/>
+            <a:ext cx="10058400" cy="256032"/>
+          </a:xfrm>
+          <a:prstGeom prst="rect">
+            <a:avLst/>
+          </a:prstGeom>
+          <a:noFill/>
+          <a:ln/>
+        </p:spPr>
+        <p:txBody>
+          <a:bodyPr wrap="square" lIns="0" tIns="0" rIns="0" bIns="0" rtlCol="0" anchor="ctr"/>
+          <a:lstStyle/>
+          <a:p>
+            <a:pPr marL="0" indent="0">
+              <a:buNone/>
+            </a:pPr>
+            <a:r>
+              <a:rPr lang="en-US" sz="1800" b="1" dirty="0">
+                <a:solidFill>
+                  <a:srgbClr val="10243E"/>
+                </a:solidFill>
+              </a:rPr>
+              <a:t>Hallucinated APIs or file paths</a:t>
+            </a:r>
+            <a:endParaRPr lang="en-US" sz="1800" dirty="0"/>
+          </a:p>
+        </p:txBody>
+      </p:sp>
+      <p:sp>
+        <p:nvSpPr>
+          <p:cNvPr id="7" name="Text 5"/>
+          <p:cNvSpPr/>
+          <p:nvPr/>
+        </p:nvSpPr>
+        <p:spPr>
+          <a:xfrm>
+            <a:off x="1124712" y="2020824"/>
+            <a:ext cx="10076688" cy="338328"/>
+          </a:xfrm>
+          <a:prstGeom prst="rect">
+            <a:avLst/>
+          </a:prstGeom>
+          <a:noFill/>
+          <a:ln/>
+        </p:spPr>
+        <p:txBody>
+          <a:bodyPr wrap="square" lIns="0" tIns="0" rIns="0" bIns="0" rtlCol="0" anchor="t"/>
+          <a:lstStyle/>
+          <a:p>
+            <a:pPr marL="0" indent="0">
+              <a:buNone/>
+            </a:pPr>
+            <a:r>
+              <a:rPr lang="en-US" dirty="0">
+                <a:solidFill>
+                  <a:srgbClr val="516173"/>
+                </a:solidFill>
+              </a:rPr>
+              <a:t>Model invents functions, packages, columns, or filenames that do not exist. </a:t>
+            </a:r>
+            <a:endParaRPr lang="en-US" dirty="0"/>
+          </a:p>
+        </p:txBody>
+      </p:sp>
+      <p:sp>
+        <p:nvSpPr>
+          <p:cNvPr id="8" name="Shape 6"/>
+          <p:cNvSpPr/>
+          <p:nvPr/>
+        </p:nvSpPr>
+        <p:spPr>
+          <a:xfrm>
+            <a:off x="868680" y="2523744"/>
+            <a:ext cx="10424160" cy="1024128"/>
+          </a:xfrm>
+          <a:prstGeom prst="roundRect">
+            <a:avLst>
+              <a:gd name="adj" fmla="val 9091"/>
+            </a:avLst>
+          </a:prstGeom>
+          <a:solidFill>
+            <a:srgbClr val="FFF3E7"/>
+          </a:solidFill>
+          <a:ln w="12700">
+            <a:solidFill>
+              <a:srgbClr val="DCE5F0"/>
+            </a:solidFill>
+            <a:prstDash val="solid"/>
+          </a:ln>
+          <a:effectLst>
+            <a:outerShdw blurRad="12700" dist="6350" dir="2700000" algn="bl" rotWithShape="0">
+              <a:srgbClr val="000000">
+                <a:alpha val="12000"/>
+              </a:srgbClr>
+            </a:outerShdw>
+          </a:effectLst>
+        </p:spPr>
+        <p:txBody>
+          <a:bodyPr/>
+          <a:lstStyle/>
+          <a:p>
+            <a:endParaRPr lang="en-US"/>
+          </a:p>
+        </p:txBody>
+      </p:sp>
+      <p:sp>
+        <p:nvSpPr>
+          <p:cNvPr id="9" name="Shape 7"/>
+          <p:cNvSpPr/>
+          <p:nvPr/>
+        </p:nvSpPr>
+        <p:spPr>
+          <a:xfrm>
+            <a:off x="886968" y="2542031"/>
+            <a:ext cx="109728" cy="977577"/>
+          </a:xfrm>
+          <a:prstGeom prst="rect">
+            <a:avLst/>
+          </a:prstGeom>
+          <a:solidFill>
+            <a:srgbClr val="B54708"/>
+          </a:solidFill>
+          <a:ln w="12700">
+            <a:solidFill>
+              <a:srgbClr val="B54708"/>
+            </a:solidFill>
+            <a:prstDash val="solid"/>
+          </a:ln>
+        </p:spPr>
+        <p:txBody>
+          <a:bodyPr/>
+          <a:lstStyle/>
+          <a:p>
+            <a:endParaRPr lang="en-US"/>
+          </a:p>
+        </p:txBody>
+      </p:sp>
+      <p:sp>
+        <p:nvSpPr>
+          <p:cNvPr id="10" name="Text 8"/>
+          <p:cNvSpPr/>
+          <p:nvPr/>
+        </p:nvSpPr>
+        <p:spPr>
+          <a:xfrm>
+            <a:off x="1124712" y="2624328"/>
+            <a:ext cx="10058400" cy="256032"/>
+          </a:xfrm>
+          <a:prstGeom prst="rect">
+            <a:avLst/>
+          </a:prstGeom>
+          <a:noFill/>
+          <a:ln/>
+        </p:spPr>
+        <p:txBody>
+          <a:bodyPr wrap="square" lIns="0" tIns="0" rIns="0" bIns="0" rtlCol="0" anchor="ctr"/>
+          <a:lstStyle/>
+          <a:p>
+            <a:pPr marL="0" indent="0">
+              <a:buNone/>
+            </a:pPr>
+            <a:r>
+              <a:rPr lang="en-US" sz="1800" b="1" dirty="0">
+                <a:solidFill>
+                  <a:srgbClr val="10243E"/>
+                </a:solidFill>
+              </a:rPr>
+              <a:t>Scientific overreach</a:t>
+            </a:r>
+            <a:endParaRPr lang="en-US" sz="1800" dirty="0"/>
+          </a:p>
+        </p:txBody>
+      </p:sp>
+      <p:sp>
+        <p:nvSpPr>
+          <p:cNvPr id="11" name="Text 9"/>
+          <p:cNvSpPr/>
+          <p:nvPr/>
+        </p:nvSpPr>
+        <p:spPr>
+          <a:xfrm>
+            <a:off x="1124712" y="2907792"/>
+            <a:ext cx="10076688" cy="548640"/>
+          </a:xfrm>
+          <a:prstGeom prst="rect">
+            <a:avLst/>
+          </a:prstGeom>
+          <a:noFill/>
+          <a:ln/>
+        </p:spPr>
+        <p:txBody>
+          <a:bodyPr wrap="square" lIns="0" tIns="0" rIns="0" bIns="0" rtlCol="0" anchor="t"/>
+          <a:lstStyle/>
+          <a:p>
+            <a:pPr marL="0" indent="0">
+              <a:buNone/>
+            </a:pPr>
+            <a:r>
+              <a:rPr lang="en-US" dirty="0">
+                <a:solidFill>
+                  <a:srgbClr val="516173"/>
+                </a:solidFill>
+              </a:rPr>
+              <a:t>Interpretation exceeds what the statistics support  </a:t>
+            </a:r>
+            <a:r>
+              <a:rPr lang="en-US" dirty="0">
+                <a:solidFill>
+                  <a:srgbClr val="516173"/>
+                </a:solidFill>
+                <a:sym typeface="Wingdings" pitchFamily="2" charset="2"/>
+              </a:rPr>
+              <a:t> </a:t>
+            </a:r>
+            <a:r>
+              <a:rPr lang="en-US" dirty="0">
+                <a:solidFill>
+                  <a:srgbClr val="516173"/>
+                </a:solidFill>
+              </a:rPr>
+              <a:t>cautious language and human review of conclusions.</a:t>
+            </a:r>
+            <a:endParaRPr lang="en-US" dirty="0"/>
+          </a:p>
+        </p:txBody>
+      </p:sp>
+      <p:sp>
+        <p:nvSpPr>
+          <p:cNvPr id="12" name="Shape 10"/>
+          <p:cNvSpPr/>
+          <p:nvPr/>
+        </p:nvSpPr>
+        <p:spPr>
+          <a:xfrm>
+            <a:off x="868680" y="3694176"/>
+            <a:ext cx="10424160" cy="804672"/>
+          </a:xfrm>
+          <a:prstGeom prst="roundRect">
+            <a:avLst>
+              <a:gd name="adj" fmla="val 9091"/>
+            </a:avLst>
+          </a:prstGeom>
+          <a:solidFill>
+            <a:srgbClr val="EAF2FF"/>
+          </a:solidFill>
+          <a:ln w="12700">
+            <a:solidFill>
+              <a:srgbClr val="DCE5F0"/>
+            </a:solidFill>
+            <a:prstDash val="solid"/>
+          </a:ln>
+          <a:effectLst>
+            <a:outerShdw blurRad="12700" dist="6350" dir="2700000" algn="bl" rotWithShape="0">
+              <a:srgbClr val="000000">
+                <a:alpha val="12000"/>
+              </a:srgbClr>
+            </a:outerShdw>
+          </a:effectLst>
+        </p:spPr>
+        <p:txBody>
+          <a:bodyPr/>
+          <a:lstStyle/>
+          <a:p>
+            <a:endParaRPr lang="en-US"/>
+          </a:p>
+        </p:txBody>
+      </p:sp>
+      <p:sp>
+        <p:nvSpPr>
+          <p:cNvPr id="13" name="Shape 11"/>
+          <p:cNvSpPr/>
+          <p:nvPr/>
+        </p:nvSpPr>
+        <p:spPr>
+          <a:xfrm>
+            <a:off x="886968" y="3712464"/>
+            <a:ext cx="109728" cy="768096"/>
+          </a:xfrm>
+          <a:prstGeom prst="rect">
+            <a:avLst/>
+          </a:prstGeom>
+          <a:solidFill>
+            <a:srgbClr val="2F6FDE"/>
+          </a:solidFill>
+          <a:ln w="12700">
+            <a:solidFill>
+              <a:srgbClr val="2F6FDE"/>
+            </a:solidFill>
+            <a:prstDash val="solid"/>
+          </a:ln>
+        </p:spPr>
+        <p:txBody>
+          <a:bodyPr/>
+          <a:lstStyle/>
+          <a:p>
+            <a:endParaRPr lang="en-US"/>
+          </a:p>
+        </p:txBody>
+      </p:sp>
+      <p:sp>
+        <p:nvSpPr>
+          <p:cNvPr id="14" name="Text 12"/>
+          <p:cNvSpPr/>
+          <p:nvPr/>
+        </p:nvSpPr>
+        <p:spPr>
+          <a:xfrm>
+            <a:off x="1124712" y="3749040"/>
+            <a:ext cx="10058400" cy="256032"/>
+          </a:xfrm>
+          <a:prstGeom prst="rect">
+            <a:avLst/>
+          </a:prstGeom>
+          <a:noFill/>
+          <a:ln/>
+        </p:spPr>
+        <p:txBody>
+          <a:bodyPr wrap="square" lIns="0" tIns="0" rIns="0" bIns="0" rtlCol="0" anchor="ctr"/>
+          <a:lstStyle/>
+          <a:p>
+            <a:pPr marL="0" indent="0">
+              <a:buNone/>
+            </a:pPr>
+            <a:r>
+              <a:rPr lang="en-US" sz="1800" b="1" dirty="0">
+                <a:solidFill>
+                  <a:srgbClr val="10243E"/>
+                </a:solidFill>
+              </a:rPr>
+              <a:t>Silent assumption injection</a:t>
+            </a:r>
+            <a:endParaRPr lang="en-US" sz="1800" dirty="0"/>
+          </a:p>
+        </p:txBody>
+      </p:sp>
+      <p:sp>
+        <p:nvSpPr>
+          <p:cNvPr id="15" name="Text 13"/>
+          <p:cNvSpPr/>
+          <p:nvPr/>
+        </p:nvSpPr>
+        <p:spPr>
+          <a:xfrm>
+            <a:off x="1124712" y="4096512"/>
+            <a:ext cx="10076688" cy="310896"/>
+          </a:xfrm>
+          <a:prstGeom prst="rect">
+            <a:avLst/>
+          </a:prstGeom>
+          <a:noFill/>
+          <a:ln/>
+        </p:spPr>
+        <p:txBody>
+          <a:bodyPr wrap="square" lIns="0" tIns="0" rIns="0" bIns="0" rtlCol="0" anchor="t"/>
+          <a:lstStyle/>
+          <a:p>
+            <a:pPr marL="0" indent="0">
+              <a:buNone/>
+            </a:pPr>
+            <a:r>
+              <a:rPr lang="en-US" dirty="0">
+                <a:solidFill>
+                  <a:srgbClr val="516173"/>
+                </a:solidFill>
+              </a:rPr>
+              <a:t>The model fills gaps without clearly flagging assumptions </a:t>
+            </a:r>
+            <a:r>
+              <a:rPr lang="en-US" dirty="0">
+                <a:solidFill>
+                  <a:srgbClr val="516173"/>
+                </a:solidFill>
+                <a:sym typeface="Wingdings" pitchFamily="2" charset="2"/>
+              </a:rPr>
+              <a:t> </a:t>
+            </a:r>
+            <a:r>
+              <a:rPr lang="en-US" dirty="0">
+                <a:solidFill>
+                  <a:srgbClr val="516173"/>
+                </a:solidFill>
+              </a:rPr>
+              <a:t>require explicit assumptions</a:t>
+            </a:r>
+            <a:endParaRPr lang="en-US" dirty="0"/>
+          </a:p>
+        </p:txBody>
+      </p:sp>
+      <p:sp>
+        <p:nvSpPr>
+          <p:cNvPr id="16" name="Shape 14"/>
+          <p:cNvSpPr/>
+          <p:nvPr/>
+        </p:nvSpPr>
+        <p:spPr>
+          <a:xfrm>
+            <a:off x="868680" y="4654296"/>
+            <a:ext cx="10424160" cy="804672"/>
+          </a:xfrm>
+          <a:prstGeom prst="roundRect">
+            <a:avLst>
+              <a:gd name="adj" fmla="val 9091"/>
+            </a:avLst>
+          </a:prstGeom>
+          <a:solidFill>
+            <a:srgbClr val="FDECEC"/>
+          </a:solidFill>
+          <a:ln w="12700">
+            <a:solidFill>
+              <a:srgbClr val="DCE5F0"/>
+            </a:solidFill>
+            <a:prstDash val="solid"/>
+          </a:ln>
+          <a:effectLst>
+            <a:outerShdw blurRad="12700" dist="6350" dir="2700000" algn="bl" rotWithShape="0">
+              <a:srgbClr val="000000">
+                <a:alpha val="12000"/>
+              </a:srgbClr>
+            </a:outerShdw>
+          </a:effectLst>
+        </p:spPr>
+        <p:txBody>
+          <a:bodyPr/>
+          <a:lstStyle/>
+          <a:p>
+            <a:endParaRPr lang="en-US"/>
+          </a:p>
+        </p:txBody>
+      </p:sp>
+      <p:sp>
+        <p:nvSpPr>
+          <p:cNvPr id="17" name="Shape 15"/>
+          <p:cNvSpPr/>
+          <p:nvPr/>
+        </p:nvSpPr>
+        <p:spPr>
+          <a:xfrm>
+            <a:off x="886968" y="4672584"/>
+            <a:ext cx="109728" cy="768096"/>
+          </a:xfrm>
+          <a:prstGeom prst="rect">
+            <a:avLst/>
+          </a:prstGeom>
+          <a:solidFill>
+            <a:srgbClr val="B42318"/>
+          </a:solidFill>
+          <a:ln w="12700">
+            <a:solidFill>
+              <a:srgbClr val="B42318"/>
+            </a:solidFill>
+            <a:prstDash val="solid"/>
+          </a:ln>
+        </p:spPr>
+        <p:txBody>
+          <a:bodyPr/>
+          <a:lstStyle/>
+          <a:p>
+            <a:endParaRPr lang="en-US"/>
+          </a:p>
+        </p:txBody>
+      </p:sp>
+      <p:sp>
+        <p:nvSpPr>
+          <p:cNvPr id="18" name="Text 16"/>
+          <p:cNvSpPr/>
+          <p:nvPr/>
+        </p:nvSpPr>
+        <p:spPr>
+          <a:xfrm>
+            <a:off x="1124712" y="4745736"/>
+            <a:ext cx="10058400" cy="256032"/>
+          </a:xfrm>
+          <a:prstGeom prst="rect">
+            <a:avLst/>
+          </a:prstGeom>
+          <a:noFill/>
+          <a:ln/>
+        </p:spPr>
+        <p:txBody>
+          <a:bodyPr wrap="square" lIns="0" tIns="0" rIns="0" bIns="0" rtlCol="0" anchor="ctr"/>
+          <a:lstStyle/>
+          <a:p>
+            <a:pPr marL="0" indent="0">
+              <a:buNone/>
+            </a:pPr>
+            <a:r>
+              <a:rPr lang="en-US" sz="1800" b="1" dirty="0">
+                <a:solidFill>
+                  <a:srgbClr val="10243E"/>
+                </a:solidFill>
+              </a:rPr>
+              <a:t>Data leakage / privacy</a:t>
+            </a:r>
+            <a:endParaRPr lang="en-US" sz="1800" dirty="0"/>
+          </a:p>
+        </p:txBody>
+      </p:sp>
+      <p:sp>
+        <p:nvSpPr>
+          <p:cNvPr id="19" name="Text 17"/>
+          <p:cNvSpPr/>
+          <p:nvPr/>
+        </p:nvSpPr>
+        <p:spPr>
+          <a:xfrm>
+            <a:off x="1124712" y="5074920"/>
+            <a:ext cx="10076688" cy="365760"/>
+          </a:xfrm>
+          <a:prstGeom prst="rect">
+            <a:avLst/>
+          </a:prstGeom>
+          <a:noFill/>
+          <a:ln/>
+        </p:spPr>
+        <p:txBody>
+          <a:bodyPr wrap="square" lIns="0" tIns="0" rIns="0" bIns="0" rtlCol="0" anchor="t"/>
+          <a:lstStyle/>
+          <a:p>
+            <a:pPr marL="0" indent="0">
+              <a:buNone/>
+            </a:pPr>
+            <a:r>
+              <a:rPr lang="en-US" dirty="0">
+                <a:solidFill>
+                  <a:srgbClr val="516173"/>
+                </a:solidFill>
+              </a:rPr>
+              <a:t>Sensitive data pasted into prompts may violate lab or patient-data rules. </a:t>
+            </a:r>
+            <a:endParaRPr lang="en-US" dirty="0"/>
+          </a:p>
+        </p:txBody>
+      </p:sp>
+      <p:sp>
+        <p:nvSpPr>
+          <p:cNvPr id="20" name="Shape 18"/>
+          <p:cNvSpPr/>
+          <p:nvPr/>
+        </p:nvSpPr>
+        <p:spPr>
+          <a:xfrm>
+            <a:off x="868680" y="5586984"/>
+            <a:ext cx="10424160" cy="804672"/>
+          </a:xfrm>
+          <a:prstGeom prst="roundRect">
+            <a:avLst>
+              <a:gd name="adj" fmla="val 9091"/>
+            </a:avLst>
+          </a:prstGeom>
+          <a:solidFill>
+            <a:srgbClr val="E7F6F2"/>
+          </a:solidFill>
+          <a:ln w="12700">
+            <a:solidFill>
+              <a:srgbClr val="DCE5F0"/>
+            </a:solidFill>
+            <a:prstDash val="solid"/>
+          </a:ln>
+          <a:effectLst>
+            <a:outerShdw blurRad="12700" dist="6350" dir="2700000" algn="bl" rotWithShape="0">
+              <a:srgbClr val="000000">
+                <a:alpha val="12000"/>
+              </a:srgbClr>
+            </a:outerShdw>
+          </a:effectLst>
+        </p:spPr>
+        <p:txBody>
+          <a:bodyPr/>
+          <a:lstStyle/>
+          <a:p>
+            <a:endParaRPr lang="en-US"/>
+          </a:p>
+        </p:txBody>
+      </p:sp>
+      <p:sp>
+        <p:nvSpPr>
+          <p:cNvPr id="21" name="Shape 19"/>
+          <p:cNvSpPr/>
+          <p:nvPr/>
+        </p:nvSpPr>
+        <p:spPr>
+          <a:xfrm>
+            <a:off x="886968" y="5605272"/>
+            <a:ext cx="109728" cy="768096"/>
+          </a:xfrm>
+          <a:prstGeom prst="rect">
+            <a:avLst/>
+          </a:prstGeom>
+          <a:solidFill>
+            <a:srgbClr val="0F766E"/>
+          </a:solidFill>
+          <a:ln w="12700">
+            <a:solidFill>
+              <a:srgbClr val="0F766E"/>
+            </a:solidFill>
+            <a:prstDash val="solid"/>
+          </a:ln>
+        </p:spPr>
+        <p:txBody>
+          <a:bodyPr/>
+          <a:lstStyle/>
+          <a:p>
+            <a:endParaRPr lang="en-US"/>
+          </a:p>
+        </p:txBody>
+      </p:sp>
+      <p:sp>
+        <p:nvSpPr>
+          <p:cNvPr id="22" name="Text 20"/>
+          <p:cNvSpPr/>
+          <p:nvPr/>
+        </p:nvSpPr>
+        <p:spPr>
+          <a:xfrm>
+            <a:off x="1124712" y="5678424"/>
+            <a:ext cx="10058400" cy="256032"/>
+          </a:xfrm>
+          <a:prstGeom prst="rect">
+            <a:avLst/>
+          </a:prstGeom>
+          <a:noFill/>
+          <a:ln/>
+        </p:spPr>
+        <p:txBody>
+          <a:bodyPr wrap="square" lIns="0" tIns="0" rIns="0" bIns="0" rtlCol="0" anchor="ctr"/>
+          <a:lstStyle/>
+          <a:p>
+            <a:pPr marL="0" indent="0">
+              <a:buNone/>
+            </a:pPr>
+            <a:r>
+              <a:rPr lang="en-US" sz="1800" b="1" dirty="0">
+                <a:solidFill>
+                  <a:srgbClr val="10243E"/>
+                </a:solidFill>
+              </a:rPr>
+              <a:t>Brittle dependence on phrasing</a:t>
+            </a:r>
+            <a:endParaRPr lang="en-US" sz="1800" dirty="0"/>
+          </a:p>
+        </p:txBody>
+      </p:sp>
+      <p:sp>
+        <p:nvSpPr>
+          <p:cNvPr id="23" name="Text 21"/>
+          <p:cNvSpPr/>
+          <p:nvPr/>
+        </p:nvSpPr>
+        <p:spPr>
+          <a:xfrm>
+            <a:off x="1124712" y="6099048"/>
+            <a:ext cx="10076688" cy="292608"/>
+          </a:xfrm>
+          <a:prstGeom prst="rect">
+            <a:avLst/>
+          </a:prstGeom>
+          <a:noFill/>
+          <a:ln/>
+        </p:spPr>
+        <p:txBody>
+          <a:bodyPr wrap="square" lIns="0" tIns="0" rIns="0" bIns="0" rtlCol="0" anchor="t"/>
+          <a:lstStyle/>
+          <a:p>
+            <a:pPr marL="0" indent="0">
+              <a:buNone/>
+            </a:pPr>
+            <a:r>
+              <a:rPr lang="en-US" dirty="0">
+                <a:solidFill>
+                  <a:srgbClr val="516173"/>
+                </a:solidFill>
+              </a:rPr>
+              <a:t>A solution works only for one wording and fails under small changes.  </a:t>
+            </a:r>
+            <a:endParaRPr lang="en-US" dirty="0"/>
+          </a:p>
+        </p:txBody>
+      </p:sp>
+      <p:sp>
+        <p:nvSpPr>
+          <p:cNvPr id="24" name="Shape 3">
+            <a:extLst>
+              <a:ext uri="{FF2B5EF4-FFF2-40B4-BE49-F238E27FC236}">
+                <a16:creationId xmlns:a16="http://schemas.microsoft.com/office/drawing/2014/main" id="{54918A35-04DC-E7DB-2840-CEAB741048BB}"/>
               </a:ext>
             </a:extLst>
           </p:cNvPr>
@@ -11888,49 +11279,6 @@
 </a:themeOverride>
 </file>
 
-<file path=ppt/theme/themeOverride10.xml><?xml version="1.0" encoding="utf-8"?>
-<a:themeOverride xmlns:a="http://schemas.openxmlformats.org/drawingml/2006/main">
-  <a:clrScheme name="Office">
-    <a:dk1>
-      <a:sysClr val="windowText" lastClr="000000"/>
-    </a:dk1>
-    <a:lt1>
-      <a:sysClr val="window" lastClr="FFFFFF"/>
-    </a:lt1>
-    <a:dk2>
-      <a:srgbClr val="44546A"/>
-    </a:dk2>
-    <a:lt2>
-      <a:srgbClr val="E7E6E6"/>
-    </a:lt2>
-    <a:accent1>
-      <a:srgbClr val="4472C4"/>
-    </a:accent1>
-    <a:accent2>
-      <a:srgbClr val="ED7D31"/>
-    </a:accent2>
-    <a:accent3>
-      <a:srgbClr val="A5A5A5"/>
-    </a:accent3>
-    <a:accent4>
-      <a:srgbClr val="FFC000"/>
-    </a:accent4>
-    <a:accent5>
-      <a:srgbClr val="5B9BD5"/>
-    </a:accent5>
-    <a:accent6>
-      <a:srgbClr val="70AD47"/>
-    </a:accent6>
-    <a:hlink>
-      <a:srgbClr val="0563C1"/>
-    </a:hlink>
-    <a:folHlink>
-      <a:srgbClr val="954F72"/>
-    </a:folHlink>
-  </a:clrScheme>
-</a:themeOverride>
-</file>
-
 <file path=ppt/theme/themeOverride2.xml><?xml version="1.0" encoding="utf-8"?>
 <a:themeOverride xmlns:a="http://schemas.openxmlformats.org/drawingml/2006/main">
   <a:clrScheme name="Office">
